--- a/Statify_bemutato.pptx
+++ b/Statify_bemutato.pptx
@@ -36533,7 +36533,39 @@
                   <a:schemeClr val="accent1"/>
                 </a:solidFill>
               </a:rPr>
-              <a:t>Főoldal, fiókrendszer és összefésülés</a:t>
+              <a:t>Főoldal, fiókrendszer </a:t>
+            </a:r>
+            <a:r>
+              <a:rPr lang="en-US" sz="1400" i="1" dirty="0" err="1">
+                <a:solidFill>
+                  <a:schemeClr val="accent1"/>
+                </a:solidFill>
+              </a:rPr>
+              <a:t>és</a:t>
+            </a:r>
+            <a:r>
+              <a:rPr lang="en-US" sz="1400" i="1" dirty="0">
+                <a:solidFill>
+                  <a:schemeClr val="accent1"/>
+                </a:solidFill>
+              </a:rPr>
+              <a:t> </a:t>
+            </a:r>
+            <a:r>
+              <a:rPr lang="en-US" sz="1400" i="1" dirty="0" err="1">
+                <a:solidFill>
+                  <a:schemeClr val="accent1"/>
+                </a:solidFill>
+              </a:rPr>
+              <a:t>összefésülés</a:t>
+            </a:r>
+            <a:r>
+              <a:rPr lang="hu-HU" sz="1400" i="1" dirty="0">
+                <a:solidFill>
+                  <a:schemeClr val="accent1"/>
+                </a:solidFill>
+              </a:rPr>
+              <a:t>, projektmenedzser</a:t>
             </a:r>
             <a:endParaRPr lang="en-US" sz="1400" dirty="0"/>
           </a:p>
@@ -36547,7 +36579,7 @@
         </p:nvSpPr>
         <p:spPr>
           <a:xfrm>
-            <a:off x="868680" y="3017520"/>
+            <a:off x="868680" y="3044952"/>
             <a:ext cx="2971800" cy="1783080"/>
           </a:xfrm>
           <a:prstGeom prst="rect">
@@ -36627,9 +36659,50 @@
                   <a:schemeClr val="bg1"/>
                 </a:solidFill>
               </a:rPr>
-              <a:t>A három oldal egységesítése</a:t>
+              <a:t>A három </a:t>
             </a:r>
-            <a:endParaRPr lang="en-US" sz="1500" dirty="0"/>
+            <a:r>
+              <a:rPr lang="en-US" sz="1500" dirty="0" err="1">
+                <a:solidFill>
+                  <a:schemeClr val="bg1"/>
+                </a:solidFill>
+              </a:rPr>
+              <a:t>oldal</a:t>
+            </a:r>
+            <a:r>
+              <a:rPr lang="en-US" sz="1500" dirty="0">
+                <a:solidFill>
+                  <a:schemeClr val="bg1"/>
+                </a:solidFill>
+              </a:rPr>
+              <a:t> </a:t>
+            </a:r>
+            <a:r>
+              <a:rPr lang="en-US" sz="1500" dirty="0" err="1">
+                <a:solidFill>
+                  <a:schemeClr val="bg1"/>
+                </a:solidFill>
+              </a:rPr>
+              <a:t>egységesítése</a:t>
+            </a:r>
+            <a:endParaRPr lang="hu-HU" sz="1500" dirty="0"/>
+          </a:p>
+          <a:p>
+            <a:pPr marL="203200" indent="-203200">
+              <a:spcAft>
+                <a:spcPts val="1000"/>
+              </a:spcAft>
+              <a:buSzPct val="100000"/>
+              <a:buChar char="•"/>
+            </a:pPr>
+            <a:r>
+              <a:rPr lang="hu-HU" sz="1500" dirty="0">
+                <a:solidFill>
+                  <a:schemeClr val="bg1"/>
+                </a:solidFill>
+              </a:rPr>
+              <a:t>Bemutató elkészítése</a:t>
+            </a:r>
           </a:p>
         </p:txBody>
       </p:sp>
@@ -36641,7 +36714,7 @@
         </p:nvSpPr>
         <p:spPr>
           <a:xfrm>
-            <a:off x="868680" y="4828032"/>
+            <a:off x="868680" y="4924820"/>
             <a:ext cx="2743200" cy="274320"/>
           </a:xfrm>
           <a:prstGeom prst="rect">
